--- a/etc/Architecture  .pptx
+++ b/etc/Architecture  .pptx
@@ -104,6 +104,11 @@
       </a:defRPr>
     </a:lvl9pPr>
   </p:defaultTextStyle>
+  <p:extLst>
+    <p:ext uri="{EFAFB233-063F-42B5-8137-9DF3F51BA10A}">
+      <p15:sldGuideLst xmlns:p15="http://schemas.microsoft.com/office/powerpoint/2012/main"/>
+    </p:ext>
+  </p:extLst>
 </p:presentation>
 </file>
 
@@ -3976,42 +3981,6 @@
               <a:t>Java Persistence API</a:t>
             </a:r>
             <a:endParaRPr kumimoji="1" lang="ko-KR" altLang="en-US" dirty="0"/>
-          </a:p>
-        </p:txBody>
-      </p:sp>
-      <p:sp>
-        <p:nvSpPr>
-          <p:cNvPr id="26" name="TextBox 25">
-            <a:extLst>
-              <a:ext uri="{FF2B5EF4-FFF2-40B4-BE49-F238E27FC236}">
-                <a16:creationId xmlns:a16="http://schemas.microsoft.com/office/drawing/2014/main" id="{5054D1BB-46EC-E08A-5F03-AE4CA43F9A3D}"/>
-              </a:ext>
-            </a:extLst>
-          </p:cNvPr>
-          <p:cNvSpPr txBox="1"/>
-          <p:nvPr/>
-        </p:nvSpPr>
-        <p:spPr>
-          <a:xfrm>
-            <a:off x="96031" y="130516"/>
-            <a:ext cx="2133600" cy="461665"/>
-          </a:xfrm>
-          <a:prstGeom prst="rect">
-            <a:avLst/>
-          </a:prstGeom>
-          <a:noFill/>
-        </p:spPr>
-        <p:txBody>
-          <a:bodyPr wrap="square" rtlCol="0">
-            <a:spAutoFit/>
-          </a:bodyPr>
-          <a:lstStyle/>
-          <a:p>
-            <a:r>
-              <a:rPr kumimoji="1" lang="en-US" altLang="ko-KR" sz="2400" dirty="0"/>
-              <a:t>Architecture</a:t>
-            </a:r>
-            <a:endParaRPr kumimoji="1" lang="ko-KR" altLang="en-US" sz="2400" dirty="0"/>
           </a:p>
         </p:txBody>
       </p:sp>
